--- a/オープンキャンパス紹介スライド.pptx
+++ b/オープンキャンパス紹介スライド.pptx
@@ -1897,6 +1897,17 @@
               <a:buNone/>
             </a:pPr>
             <a:r>
+              <a:rPr lang="en-US" sz="1400" b="1" dirty="0" err="1">
+                <a:solidFill>
+                  <a:srgbClr val="2DE1FC"/>
+                </a:solidFill>
+                <a:latin typeface="Yu Gothic" pitchFamily="34" charset="0"/>
+                <a:ea typeface="Yu Gothic" pitchFamily="34" charset="-122"/>
+                <a:cs typeface="Yu Gothic" pitchFamily="34" charset="-120"/>
+              </a:rPr>
+              <a:t>制限時間</a:t>
+            </a:r>
+            <a:r>
               <a:rPr lang="en-US" sz="1400" b="1" dirty="0">
                 <a:solidFill>
                   <a:srgbClr val="2DE1FC"/>
@@ -1905,7 +1916,7 @@
                 <a:ea typeface="Yu Gothic" pitchFamily="34" charset="-122"/>
                 <a:cs typeface="Yu Gothic" pitchFamily="34" charset="-120"/>
               </a:rPr>
-              <a:t>制限時間 30秒</a:t>
+              <a:t> 60秒</a:t>
             </a:r>
             <a:endParaRPr lang="en-US" sz="1400" dirty="0"/>
           </a:p>
@@ -2382,7 +2393,82 @@
                 <a:ea typeface="Yu Gothic" pitchFamily="34" charset="-122"/>
                 <a:cs typeface="Yu Gothic" pitchFamily="34" charset="-120"/>
               </a:rPr>
-              <a:t>Beam Pro を体の正面に向けて画面をタップ。正面の基準が決まる！</a:t>
+              <a:t>Beam Pro </a:t>
+            </a:r>
+            <a:r>
+              <a:rPr lang="en-US" sz="1400" dirty="0" err="1">
+                <a:solidFill>
+                  <a:srgbClr val="FFFFFF"/>
+                </a:solidFill>
+                <a:latin typeface="Yu Gothic" pitchFamily="34" charset="0"/>
+                <a:ea typeface="Yu Gothic" pitchFamily="34" charset="-122"/>
+                <a:cs typeface="Yu Gothic" pitchFamily="34" charset="-120"/>
+              </a:rPr>
+              <a:t>を自然に</a:t>
+            </a:r>
+            <a:br>
+              <a:rPr lang="en-US" sz="1400" dirty="0">
+                <a:solidFill>
+                  <a:srgbClr val="FFFFFF"/>
+                </a:solidFill>
+                <a:latin typeface="Yu Gothic" pitchFamily="34" charset="0"/>
+                <a:ea typeface="Yu Gothic" pitchFamily="34" charset="-122"/>
+                <a:cs typeface="Yu Gothic" pitchFamily="34" charset="-120"/>
+              </a:rPr>
+            </a:br>
+            <a:r>
+              <a:rPr lang="en-US" sz="1400" dirty="0" err="1">
+                <a:solidFill>
+                  <a:srgbClr val="FFFFFF"/>
+                </a:solidFill>
+                <a:latin typeface="Yu Gothic" pitchFamily="34" charset="0"/>
+                <a:ea typeface="Yu Gothic" pitchFamily="34" charset="-122"/>
+                <a:cs typeface="Yu Gothic" pitchFamily="34" charset="-120"/>
+              </a:rPr>
+              <a:t>持って画面をタップ</a:t>
+            </a:r>
+            <a:r>
+              <a:rPr lang="en-US" sz="1400" dirty="0">
+                <a:solidFill>
+                  <a:srgbClr val="FFFFFF"/>
+                </a:solidFill>
+                <a:latin typeface="Yu Gothic" pitchFamily="34" charset="0"/>
+                <a:ea typeface="Yu Gothic" pitchFamily="34" charset="-122"/>
+                <a:cs typeface="Yu Gothic" pitchFamily="34" charset="-120"/>
+              </a:rPr>
+              <a:t>。</a:t>
+            </a:r>
+            <a:br>
+              <a:rPr lang="en-US" sz="1400" dirty="0">
+                <a:solidFill>
+                  <a:srgbClr val="FFFFFF"/>
+                </a:solidFill>
+                <a:latin typeface="Yu Gothic" pitchFamily="34" charset="0"/>
+                <a:ea typeface="Yu Gothic" pitchFamily="34" charset="-122"/>
+                <a:cs typeface="Yu Gothic" pitchFamily="34" charset="-120"/>
+              </a:rPr>
+            </a:br>
+            <a:r>
+              <a:rPr lang="en-US" sz="1400" dirty="0" err="1">
+                <a:solidFill>
+                  <a:srgbClr val="FFFFFF"/>
+                </a:solidFill>
+                <a:latin typeface="Yu Gothic" pitchFamily="34" charset="0"/>
+                <a:ea typeface="Yu Gothic" pitchFamily="34" charset="-122"/>
+                <a:cs typeface="Yu Gothic" pitchFamily="34" charset="-120"/>
+              </a:rPr>
+              <a:t>正面の基準が決まる</a:t>
+            </a:r>
+            <a:r>
+              <a:rPr lang="en-US" sz="1400" dirty="0">
+                <a:solidFill>
+                  <a:srgbClr val="FFFFFF"/>
+                </a:solidFill>
+                <a:latin typeface="Yu Gothic" pitchFamily="34" charset="0"/>
+                <a:ea typeface="Yu Gothic" pitchFamily="34" charset="-122"/>
+                <a:cs typeface="Yu Gothic" pitchFamily="34" charset="-120"/>
+              </a:rPr>
+              <a:t>！</a:t>
             </a:r>
             <a:endParaRPr lang="en-US" sz="1400" dirty="0"/>
           </a:p>
@@ -3599,7 +3685,61 @@
                 <a:ea typeface="Yu Gothic" pitchFamily="34" charset="-122"/>
                 <a:cs typeface="Yu Gothic" pitchFamily="34" charset="-120"/>
               </a:rPr>
-              <a:t>弾を発射 ／ 決定。これだけで最後まで遊べます。</a:t>
+              <a:t>弾を発射 ／ </a:t>
+            </a:r>
+            <a:r>
+              <a:rPr lang="en-US" sz="1400" dirty="0" err="1">
+                <a:solidFill>
+                  <a:srgbClr val="9AA7CE"/>
+                </a:solidFill>
+                <a:latin typeface="Yu Gothic" pitchFamily="34" charset="0"/>
+                <a:ea typeface="Yu Gothic" pitchFamily="34" charset="-122"/>
+                <a:cs typeface="Yu Gothic" pitchFamily="34" charset="-120"/>
+              </a:rPr>
+              <a:t>決定</a:t>
+            </a:r>
+            <a:r>
+              <a:rPr lang="en-US" sz="1400" dirty="0">
+                <a:solidFill>
+                  <a:srgbClr val="9AA7CE"/>
+                </a:solidFill>
+                <a:latin typeface="Yu Gothic" pitchFamily="34" charset="0"/>
+                <a:ea typeface="Yu Gothic" pitchFamily="34" charset="-122"/>
+                <a:cs typeface="Yu Gothic" pitchFamily="34" charset="-120"/>
+              </a:rPr>
+              <a:t>。</a:t>
+            </a:r>
+            <a:br>
+              <a:rPr lang="en-US" sz="1400" dirty="0">
+                <a:solidFill>
+                  <a:srgbClr val="9AA7CE"/>
+                </a:solidFill>
+                <a:latin typeface="Yu Gothic" pitchFamily="34" charset="0"/>
+                <a:ea typeface="Yu Gothic" pitchFamily="34" charset="-122"/>
+                <a:cs typeface="Yu Gothic" pitchFamily="34" charset="-120"/>
+              </a:rPr>
+            </a:br>
+            <a:r>
+              <a:rPr lang="en-US" sz="1400" dirty="0" err="1">
+                <a:solidFill>
+                  <a:srgbClr val="9AA7CE"/>
+                </a:solidFill>
+                <a:latin typeface="Yu Gothic" pitchFamily="34" charset="0"/>
+                <a:ea typeface="Yu Gothic" pitchFamily="34" charset="-122"/>
+                <a:cs typeface="Yu Gothic" pitchFamily="34" charset="-120"/>
+              </a:rPr>
+              <a:t>これだけで最後まで遊べます</a:t>
+            </a:r>
+            <a:r>
+              <a:rPr lang="en-US" sz="1400" dirty="0">
+                <a:solidFill>
+                  <a:srgbClr val="9AA7CE"/>
+                </a:solidFill>
+                <a:latin typeface="Yu Gothic" pitchFamily="34" charset="0"/>
+                <a:ea typeface="Yu Gothic" pitchFamily="34" charset="-122"/>
+                <a:cs typeface="Yu Gothic" pitchFamily="34" charset="-120"/>
+              </a:rPr>
+              <a:t>。</a:t>
             </a:r>
             <a:endParaRPr lang="en-US" sz="1400" dirty="0"/>
           </a:p>
@@ -3877,6 +4017,17 @@
               <a:buNone/>
             </a:pPr>
             <a:r>
+              <a:rPr lang="en-US" sz="1400" dirty="0" err="1">
+                <a:solidFill>
+                  <a:srgbClr val="9AA7CE"/>
+                </a:solidFill>
+                <a:latin typeface="Yu Gothic" pitchFamily="34" charset="0"/>
+                <a:ea typeface="Yu Gothic" pitchFamily="34" charset="-122"/>
+                <a:cs typeface="Yu Gothic" pitchFamily="34" charset="-120"/>
+              </a:rPr>
+              <a:t>弾が当たる予想位置の目印</a:t>
+            </a:r>
+            <a:r>
               <a:rPr lang="en-US" sz="1400" dirty="0">
                 <a:solidFill>
                   <a:srgbClr val="9AA7CE"/>
@@ -3885,7 +4036,39 @@
                 <a:ea typeface="Yu Gothic" pitchFamily="34" charset="-122"/>
                 <a:cs typeface="Yu Gothic" pitchFamily="34" charset="-120"/>
               </a:rPr>
-              <a:t>弾が当たる予想位置の目印。点を的に重ねて撃とう。</a:t>
+              <a:t>。</a:t>
+            </a:r>
+            <a:br>
+              <a:rPr lang="en-US" sz="1400" dirty="0">
+                <a:solidFill>
+                  <a:srgbClr val="9AA7CE"/>
+                </a:solidFill>
+                <a:latin typeface="Yu Gothic" pitchFamily="34" charset="0"/>
+                <a:ea typeface="Yu Gothic" pitchFamily="34" charset="-122"/>
+                <a:cs typeface="Yu Gothic" pitchFamily="34" charset="-120"/>
+              </a:rPr>
+            </a:br>
+            <a:r>
+              <a:rPr lang="en-US" sz="1400" dirty="0" err="1">
+                <a:solidFill>
+                  <a:srgbClr val="9AA7CE"/>
+                </a:solidFill>
+                <a:latin typeface="Yu Gothic" pitchFamily="34" charset="0"/>
+                <a:ea typeface="Yu Gothic" pitchFamily="34" charset="-122"/>
+                <a:cs typeface="Yu Gothic" pitchFamily="34" charset="-120"/>
+              </a:rPr>
+              <a:t>点を的に重ねて撃とう</a:t>
+            </a:r>
+            <a:r>
+              <a:rPr lang="en-US" sz="1400" dirty="0">
+                <a:solidFill>
+                  <a:srgbClr val="9AA7CE"/>
+                </a:solidFill>
+                <a:latin typeface="Yu Gothic" pitchFamily="34" charset="0"/>
+                <a:ea typeface="Yu Gothic" pitchFamily="34" charset="-122"/>
+                <a:cs typeface="Yu Gothic" pitchFamily="34" charset="-120"/>
+              </a:rPr>
+              <a:t>。</a:t>
             </a:r>
             <a:endParaRPr lang="en-US" sz="1400" dirty="0"/>
           </a:p>
@@ -4629,7 +4812,7 @@
           <p:nvPr>
             <p:extLst>
               <p:ext uri="{D42A27DB-BD31-4B8C-83A1-F6EECF244321}">
-                <p14:modId xmlns:p14="http://schemas.microsoft.com/office/powerpoint/2010/main" val="1579011935"/>
+                <p14:modId xmlns:p14="http://schemas.microsoft.com/office/powerpoint/2010/main" val="1703822985"/>
               </p:ext>
             </p:extLst>
           </p:nvPr>
@@ -5026,7 +5209,7 @@
                           <a:ea typeface="Yu Gothic" pitchFamily="34" charset="-122"/>
                           <a:cs typeface="Yu Gothic" pitchFamily="34" charset="-120"/>
                         </a:rPr>
-                        <a:t>2.0 秒</a:t>
+                        <a:t>1.6 秒</a:t>
                       </a:r>
                       <a:endParaRPr lang="en-US" sz="1400" dirty="0">
                         <a:latin typeface="Yu Gothic" charset="0"/>
@@ -5305,7 +5488,7 @@
                           <a:ea typeface="Yu Gothic" pitchFamily="34" charset="-122"/>
                           <a:cs typeface="Yu Gothic" pitchFamily="34" charset="-120"/>
                         </a:rPr>
-                        <a:t>1.5 秒</a:t>
+                        <a:t>1.2 秒</a:t>
                       </a:r>
                       <a:endParaRPr lang="en-US" sz="1400" dirty="0">
                         <a:latin typeface="Yu Gothic" charset="0"/>
@@ -5373,7 +5556,7 @@
                           <a:ea typeface="Yu Gothic" pitchFamily="34" charset="-122"/>
                           <a:cs typeface="Yu Gothic" pitchFamily="34" charset="-120"/>
                         </a:rPr>
-                        <a:t>3 体</a:t>
+                        <a:t>4 体</a:t>
                       </a:r>
                       <a:endParaRPr lang="en-US" sz="1400" dirty="0">
                         <a:latin typeface="Yu Gothic" charset="0"/>
@@ -5652,7 +5835,7 @@
                           <a:ea typeface="Yu Gothic" pitchFamily="34" charset="-122"/>
                           <a:cs typeface="Yu Gothic" pitchFamily="34" charset="-120"/>
                         </a:rPr>
-                        <a:t>5 体</a:t>
+                        <a:t>6 体</a:t>
                       </a:r>
                       <a:endParaRPr lang="en-US" sz="1400" dirty="0">
                         <a:latin typeface="Yu Gothic" charset="0"/>
@@ -7111,6 +7294,17 @@
               <a:buNone/>
             </a:pPr>
             <a:r>
+              <a:rPr lang="en-US" sz="1400" dirty="0" err="1">
+                <a:solidFill>
+                  <a:srgbClr val="FFFFFF"/>
+                </a:solidFill>
+                <a:latin typeface="Yu Gothic" pitchFamily="34" charset="0"/>
+                <a:ea typeface="Yu Gothic" pitchFamily="34" charset="-122"/>
+                <a:cs typeface="Yu Gothic" pitchFamily="34" charset="-120"/>
+              </a:rPr>
+              <a:t>キャリブレーションから</a:t>
+            </a:r>
+            <a:br>
               <a:rPr lang="en-US" sz="1400" dirty="0">
                 <a:solidFill>
                   <a:srgbClr val="FFFFFF"/>
@@ -7119,7 +7313,49 @@
                 <a:ea typeface="Yu Gothic" pitchFamily="34" charset="-122"/>
                 <a:cs typeface="Yu Gothic" pitchFamily="34" charset="-120"/>
               </a:rPr>
-              <a:t>キャリブレーションからリザルトまで約1分。待ち時間も少なく、気軽にチャレンジできます。</a:t>
+            </a:br>
+            <a:r>
+              <a:rPr lang="en-US" sz="1400" dirty="0">
+                <a:solidFill>
+                  <a:srgbClr val="FFFFFF"/>
+                </a:solidFill>
+                <a:latin typeface="Yu Gothic" pitchFamily="34" charset="0"/>
+                <a:ea typeface="Yu Gothic" pitchFamily="34" charset="-122"/>
+                <a:cs typeface="Yu Gothic" pitchFamily="34" charset="-120"/>
+              </a:rPr>
+              <a:t>リザルトまで約1分。</a:t>
+            </a:r>
+            <a:br>
+              <a:rPr lang="en-US" sz="1400" dirty="0">
+                <a:solidFill>
+                  <a:srgbClr val="FFFFFF"/>
+                </a:solidFill>
+                <a:latin typeface="Yu Gothic" pitchFamily="34" charset="0"/>
+                <a:ea typeface="Yu Gothic" pitchFamily="34" charset="-122"/>
+                <a:cs typeface="Yu Gothic" pitchFamily="34" charset="-120"/>
+              </a:rPr>
+            </a:br>
+            <a:r>
+              <a:rPr lang="en-US" sz="1400" dirty="0" err="1">
+                <a:solidFill>
+                  <a:srgbClr val="FFFFFF"/>
+                </a:solidFill>
+                <a:latin typeface="Yu Gothic" pitchFamily="34" charset="0"/>
+                <a:ea typeface="Yu Gothic" pitchFamily="34" charset="-122"/>
+                <a:cs typeface="Yu Gothic" pitchFamily="34" charset="-120"/>
+              </a:rPr>
+              <a:t>気軽にチャレンジできます</a:t>
+            </a:r>
+            <a:r>
+              <a:rPr lang="en-US" sz="1400" dirty="0">
+                <a:solidFill>
+                  <a:srgbClr val="FFFFFF"/>
+                </a:solidFill>
+                <a:latin typeface="Yu Gothic" pitchFamily="34" charset="0"/>
+                <a:ea typeface="Yu Gothic" pitchFamily="34" charset="-122"/>
+                <a:cs typeface="Yu Gothic" pitchFamily="34" charset="-120"/>
+              </a:rPr>
+              <a:t>。</a:t>
             </a:r>
             <a:endParaRPr lang="en-US" sz="1400" dirty="0"/>
           </a:p>
